--- a/dashboard/Presentazione_Capstone_Traffic.pptx
+++ b/dashboard/Presentazione_Capstone_Traffic.pptx
@@ -3738,7 +3738,7 @@
                 <a:ea typeface="Calibri" pitchFamily="34" charset="-122"/>
                 <a:cs typeface="Calibri" pitchFamily="34" charset="-120"/>
               </a:rPr>
-              <a:t>Modello K-Means addestrato su 3 cluster fisici di rischio (Basso, Medio, Alto).</a:t>
+              <a:t>Modello K-Means addestrato su 3 cluster fisici di rischio (Basso, Medio, Alto), escludendo i comuni sotto i 500 abitanti.</a:t>
             </a:r>
             <a:endParaRPr lang="en-US" sz="1250" dirty="0"/>
           </a:p>
@@ -3934,7 +3934,7 @@
                 <a:ea typeface="Cambria" pitchFamily="34" charset="-122"/>
                 <a:cs typeface="Cambria" pitchFamily="34" charset="-120"/>
               </a:rPr>
-              <a:t>5.905</a:t>
+              <a:t>4.897</a:t>
             </a:r>
             <a:endParaRPr lang="en-US" sz="2200" dirty="0"/>
           </a:p>
@@ -4042,7 +4042,7 @@
                 <a:ea typeface="Cambria" pitchFamily="34" charset="-122"/>
                 <a:cs typeface="Cambria" pitchFamily="34" charset="-120"/>
               </a:rPr>
-              <a:t>1.846</a:t>
+              <a:t>1.940</a:t>
             </a:r>
             <a:endParaRPr lang="en-US" sz="2200" dirty="0"/>
           </a:p>
@@ -4150,7 +4150,7 @@
                 <a:ea typeface="Cambria" pitchFamily="34" charset="-122"/>
                 <a:cs typeface="Cambria" pitchFamily="34" charset="-120"/>
               </a:rPr>
-              <a:t>148</a:t>
+              <a:t>152</a:t>
             </a:r>
             <a:endParaRPr lang="en-US" sz="2200" dirty="0"/>
           </a:p>
@@ -4795,7 +4795,7 @@
                 <a:ea typeface="Calibri" pitchFamily="34" charset="-122"/>
                 <a:cs typeface="Calibri" pitchFamily="34" charset="-120"/>
               </a:rPr>
-              <a:t>Focus esclusivo sui 148 comuni ad Alto Rischio individuati dal clustering, per massimizzare l'impatto degli investimenti.</a:t>
+              <a:t>Focus esclusivo sui 152 comuni ad Alto Rischio individuati dal clustering, per massimizzare l'impatto degli investimenti.</a:t>
             </a:r>
             <a:endParaRPr lang="en-US" sz="1250" dirty="0"/>
           </a:p>

--- a/dashboard/Presentazione_Capstone_Traffic.pptx
+++ b/dashboard/Presentazione_Capstone_Traffic.pptx
@@ -4,6 +4,9 @@
   <p:sldMasterIdLst>
     <p:sldMasterId id="2147483648" r:id="rId1"/>
   </p:sldMasterIdLst>
+  <p:notesMasterIdLst>
+    <p:notesMasterId r:id="rId7"/>
+  </p:notesMasterIdLst>
   <p:sldIdLst>
     <p:sldId id="256" r:id="rId2"/>
     <p:sldId id="257" r:id="rId3"/>
@@ -11,9 +14,6 @@
     <p:sldId id="259" r:id="rId5"/>
     <p:sldId id="260" r:id="rId6"/>
   </p:sldIdLst>
-  <p:notesMasterIdLst>
-    <p:notesMasterId r:id="rId7"/>
-  </p:notesMasterIdLst>
   <p:sldSz cx="12192000" cy="6858000"/>
   <p:notesSz cx="6858000" cy="12192000"/>
   <p:defaultTextStyle>
@@ -108,6 +108,11 @@
       </a:defRPr>
     </a:lvl9pPr>
   </p:defaultTextStyle>
+  <p:extLst>
+    <p:ext uri="{EFAFB233-063F-42B5-8137-9DF3F51BA10A}">
+      <p15:sldGuideLst xmlns:p15="http://schemas.microsoft.com/office/powerpoint/2012/main"/>
+    </p:ext>
+  </p:extLst>
 </p:presentation>
 </file>
 
@@ -133,234 +138,10 @@
           <a:chExt cx="0" cy="0"/>
         </a:xfrm>
       </p:grpSpPr>
-      <p:sp>
-        <p:nvSpPr>
-          <p:cNvPr id="2" name="Header Placeholder 1"/>
-          <p:cNvSpPr>
-            <a:spLocks noGrp="1"/>
-          </p:cNvSpPr>
-          <p:nvPr>
-            <p:ph type="hdr" sz="quarter"/>
-          </p:nvPr>
-        </p:nvSpPr>
-        <p:spPr>
-          <a:xfrm>
-            <a:off x="0" y="0"/>
-            <a:ext cx="2971800" cy="458788"/>
-          </a:xfrm>
-          <a:prstGeom prst="rect">
-            <a:avLst/>
-          </a:prstGeom>
-        </p:spPr>
-        <p:txBody>
-          <a:bodyPr vert="horz" lIns="91440" tIns="45720" rIns="91440" bIns="45720" rtlCol="0"/>
-          <a:lstStyle>
-            <a:lvl1pPr algn="l">
-              <a:defRPr sz="1200"/>
-            </a:lvl1pPr>
-          </a:lstStyle>
-          <a:p>
-            <a:endParaRPr lang="en-US"/>
-          </a:p>
-        </p:txBody>
-      </p:sp>
-      <p:sp>
-        <p:nvSpPr>
-          <p:cNvPr id="3" name="Date Placeholder 2"/>
-          <p:cNvSpPr>
-            <a:spLocks noGrp="1"/>
-          </p:cNvSpPr>
-          <p:nvPr>
-            <p:ph type="dt" idx="1"/>
-          </p:nvPr>
-        </p:nvSpPr>
-        <p:spPr>
-          <a:xfrm>
-            <a:off x="3884613" y="0"/>
-            <a:ext cx="2971800" cy="458788"/>
-          </a:xfrm>
-          <a:prstGeom prst="rect">
-            <a:avLst/>
-          </a:prstGeom>
-        </p:spPr>
-        <p:txBody>
-          <a:bodyPr vert="horz" lIns="91440" tIns="45720" rIns="91440" bIns="45720" rtlCol="0"/>
-          <a:lstStyle>
-            <a:lvl1pPr algn="r">
-              <a:defRPr sz="1200"/>
-            </a:lvl1pPr>
-          </a:lstStyle>
-          <a:p>
-            <a:fld id="{5282F153-3F37-0F45-9E97-73ACFA13230C}" type="datetimeFigureOut">
-              <a:rPr lang="en-US"/>
-              <a:t>7/23/19</a:t>
-            </a:fld>
-            <a:endParaRPr lang="en-US"/>
-          </a:p>
-        </p:txBody>
-      </p:sp>
-      <p:sp>
-        <p:nvSpPr>
-          <p:cNvPr id="4" name="Slide Image Placeholder 3"/>
-          <p:cNvSpPr>
-            <a:spLocks noGrp="1" noRot="1" noChangeAspect="1"/>
-          </p:cNvSpPr>
-          <p:nvPr>
-            <p:ph type="sldImg" idx="2"/>
-          </p:nvPr>
-        </p:nvSpPr>
-        <p:spPr>
-          <a:xfrm>
-            <a:off x="685800" y="1143000"/>
-            <a:ext cx="5486400" cy="3086100"/>
-          </a:xfrm>
-          <a:prstGeom prst="rect">
-            <a:avLst/>
-          </a:prstGeom>
-          <a:noFill/>
-          <a:ln w="12700">
-            <a:solidFill>
-              <a:prstClr val="black"/>
-            </a:solidFill>
-          </a:ln>
-        </p:spPr>
-        <p:txBody>
-          <a:bodyPr vert="horz" lIns="91440" tIns="45720" rIns="91440" bIns="45720" rtlCol="0" anchor="ctr"/>
-          <a:lstStyle/>
-          <a:p>
-            <a:endParaRPr lang="en-US"/>
-          </a:p>
-        </p:txBody>
-      </p:sp>
-      <p:sp>
-        <p:nvSpPr>
-          <p:cNvPr id="5" name="Notes Placeholder 4"/>
-          <p:cNvSpPr>
-            <a:spLocks noGrp="1"/>
-          </p:cNvSpPr>
-          <p:nvPr>
-            <p:ph type="body" sz="quarter" idx="3"/>
-          </p:nvPr>
-        </p:nvSpPr>
-        <p:spPr>
-          <a:xfrm>
-            <a:off x="685800" y="4400550"/>
-            <a:ext cx="5486400" cy="3600450"/>
-          </a:xfrm>
-          <a:prstGeom prst="rect">
-            <a:avLst/>
-          </a:prstGeom>
-        </p:spPr>
-        <p:txBody>
-          <a:bodyPr vert="horz" lIns="91440" tIns="45720" rIns="91440" bIns="45720" rtlCol="0"/>
-          <a:lstStyle/>
-          <a:p>
-            <a:pPr lvl="0"/>
-            <a:r>
-              <a:rPr lang="en-US"/>
-              <a:t>Click to edit Master text styles</a:t>
-            </a:r>
-          </a:p>
-          <a:p>
-            <a:pPr lvl="1"/>
-            <a:r>
-              <a:rPr lang="en-US"/>
-              <a:t>Second level</a:t>
-            </a:r>
-          </a:p>
-          <a:p>
-            <a:pPr lvl="2"/>
-            <a:r>
-              <a:rPr lang="en-US"/>
-              <a:t>Third level</a:t>
-            </a:r>
-          </a:p>
-          <a:p>
-            <a:pPr lvl="3"/>
-            <a:r>
-              <a:rPr lang="en-US"/>
-              <a:t>Fourth level</a:t>
-            </a:r>
-          </a:p>
-          <a:p>
-            <a:pPr lvl="4"/>
-            <a:r>
-              <a:rPr lang="en-US"/>
-              <a:t>Fifth level</a:t>
-            </a:r>
-          </a:p>
-        </p:txBody>
-      </p:sp>
-      <p:sp>
-        <p:nvSpPr>
-          <p:cNvPr id="6" name="Footer Placeholder 5"/>
-          <p:cNvSpPr>
-            <a:spLocks noGrp="1"/>
-          </p:cNvSpPr>
-          <p:nvPr>
-            <p:ph type="ftr" sz="quarter" idx="4"/>
-          </p:nvPr>
-        </p:nvSpPr>
-        <p:spPr>
-          <a:xfrm>
-            <a:off x="0" y="8685213"/>
-            <a:ext cx="2971800" cy="458787"/>
-          </a:xfrm>
-          <a:prstGeom prst="rect">
-            <a:avLst/>
-          </a:prstGeom>
-        </p:spPr>
-        <p:txBody>
-          <a:bodyPr vert="horz" lIns="91440" tIns="45720" rIns="91440" bIns="45720" rtlCol="0" anchor="b"/>
-          <a:lstStyle>
-            <a:lvl1pPr algn="l">
-              <a:defRPr sz="1200"/>
-            </a:lvl1pPr>
-          </a:lstStyle>
-          <a:p>
-            <a:endParaRPr lang="en-US"/>
-          </a:p>
-        </p:txBody>
-      </p:sp>
-      <p:sp>
-        <p:nvSpPr>
-          <p:cNvPr id="7" name="Slide Number Placeholder 6"/>
-          <p:cNvSpPr>
-            <a:spLocks noGrp="1"/>
-          </p:cNvSpPr>
-          <p:nvPr>
-            <p:ph type="sldNum" sz="quarter" idx="5"/>
-          </p:nvPr>
-        </p:nvSpPr>
-        <p:spPr>
-          <a:xfrm>
-            <a:off x="3884613" y="8685213"/>
-            <a:ext cx="2971800" cy="458787"/>
-          </a:xfrm>
-          <a:prstGeom prst="rect">
-            <a:avLst/>
-          </a:prstGeom>
-        </p:spPr>
-        <p:txBody>
-          <a:bodyPr vert="horz" lIns="91440" tIns="45720" rIns="91440" bIns="45720" rtlCol="0" anchor="b"/>
-          <a:lstStyle>
-            <a:lvl1pPr algn="r">
-              <a:defRPr sz="1200"/>
-            </a:lvl1pPr>
-          </a:lstStyle>
-          <a:p>
-            <a:fld id="{CE5E9CC1-C706-0F49-92D6-E571CC5EEA8F}" type="slidenum">
-              <a:rPr lang="en-US"/>
-              <a:t>‹#›</a:t>
-            </a:fld>
-            <a:endParaRPr lang="en-US"/>
-          </a:p>
-        </p:txBody>
-      </p:sp>
     </p:spTree>
     <p:extLst>
       <p:ext uri="{BB962C8B-B14F-4D97-AF65-F5344CB8AC3E}">
-        <p14:creationId xmlns:p14="http://schemas.microsoft.com/office/powerpoint/2010/main" val="1024086991"/>
+        <p14:creationId xmlns:p14="http://schemas.microsoft.com/office/powerpoint/2010/main" val="755864130"/>
       </p:ext>
     </p:extLst>
   </p:cSld>
@@ -504,10 +285,6 @@
           <a:bodyPr/>
           <a:lstStyle/>
           <a:p>
-            <a:r>
-              <a:rPr lang="en-US" dirty="0"/>
-              <a:t/>
-            </a:r>
             <a:endParaRPr lang="en-US" dirty="0"/>
           </a:p>
         </p:txBody>
@@ -592,10 +369,6 @@
           <a:bodyPr/>
           <a:lstStyle/>
           <a:p>
-            <a:r>
-              <a:rPr lang="en-US" dirty="0"/>
-              <a:t/>
-            </a:r>
             <a:endParaRPr lang="en-US" dirty="0"/>
           </a:p>
         </p:txBody>
@@ -680,10 +453,6 @@
           <a:bodyPr/>
           <a:lstStyle/>
           <a:p>
-            <a:r>
-              <a:rPr lang="en-US" dirty="0"/>
-              <a:t/>
-            </a:r>
             <a:endParaRPr lang="en-US" dirty="0"/>
           </a:p>
         </p:txBody>
@@ -768,10 +537,6 @@
           <a:bodyPr/>
           <a:lstStyle/>
           <a:p>
-            <a:r>
-              <a:rPr lang="en-US" dirty="0"/>
-              <a:t/>
-            </a:r>
             <a:endParaRPr lang="en-US" dirty="0"/>
           </a:p>
         </p:txBody>
@@ -856,10 +621,6 @@
           <a:bodyPr/>
           <a:lstStyle/>
           <a:p>
-            <a:r>
-              <a:rPr lang="en-US" dirty="0"/>
-              <a:t/>
-            </a:r>
             <a:endParaRPr lang="en-US" dirty="0"/>
           </a:p>
         </p:txBody>
@@ -933,6 +694,11 @@
 <file path=ppt/slideMasters/slideMaster1.xml><?xml version="1.0" encoding="utf-8"?>
 <p:sldMaster xmlns:a="http://schemas.openxmlformats.org/drawingml/2006/main" xmlns:r="http://schemas.openxmlformats.org/officeDocument/2006/relationships" xmlns:p="http://schemas.openxmlformats.org/presentationml/2006/main">
   <p:cSld>
+    <p:bg>
+      <p:bgRef idx="1001">
+        <a:schemeClr val="bg1"/>
+      </p:bgRef>
+    </p:bg>
     <p:spTree>
       <p:nvGrpSpPr>
         <p:cNvPr id="1" name=""/>
@@ -1215,6 +981,7 @@
         <a:solidFill>
           <a:srgbClr val="111A26"/>
         </a:solidFill>
+        <a:effectLst/>
       </p:bgPr>
     </p:bg>
     <p:spTree>
@@ -1233,98 +1000,6 @@
       </p:grpSpPr>
       <p:sp>
         <p:nvSpPr>
-          <p:cNvPr id="2" name="Shape 0"/>
-          <p:cNvSpPr/>
-          <p:nvPr/>
-        </p:nvSpPr>
-        <p:spPr>
-          <a:xfrm>
-            <a:off x="8778240" y="-1463040"/>
-            <a:ext cx="5852160" cy="5852160"/>
-          </a:xfrm>
-          <a:prstGeom prst="ellipse">
-            <a:avLst/>
-          </a:prstGeom>
-          <a:solidFill>
-            <a:srgbClr val="1C2836">
-              <a:alpha val="60000"/>
-            </a:srgbClr>
-          </a:solidFill>
-          <a:ln/>
-        </p:spPr>
-      </p:sp>
-      <p:sp>
-        <p:nvSpPr>
-          <p:cNvPr id="3" name="Shape 1"/>
-          <p:cNvSpPr/>
-          <p:nvPr/>
-        </p:nvSpPr>
-        <p:spPr>
-          <a:xfrm>
-            <a:off x="9692640" y="-548640"/>
-            <a:ext cx="4023360" cy="4023360"/>
-          </a:xfrm>
-          <a:prstGeom prst="ellipse">
-            <a:avLst/>
-          </a:prstGeom>
-          <a:solidFill>
-            <a:srgbClr val="F5A623">
-              <a:alpha val="12000"/>
-            </a:srgbClr>
-          </a:solidFill>
-          <a:ln/>
-        </p:spPr>
-      </p:sp>
-      <p:sp>
-        <p:nvSpPr>
-          <p:cNvPr id="4" name="Shape 2"/>
-          <p:cNvSpPr/>
-          <p:nvPr/>
-        </p:nvSpPr>
-        <p:spPr>
-          <a:xfrm>
-            <a:off x="10515600" y="274320"/>
-            <a:ext cx="2377440" cy="2377440"/>
-          </a:xfrm>
-          <a:prstGeom prst="ellipse">
-            <a:avLst/>
-          </a:prstGeom>
-          <a:solidFill>
-            <a:srgbClr val="F5A623">
-              <a:alpha val="25000"/>
-            </a:srgbClr>
-          </a:solidFill>
-          <a:ln/>
-        </p:spPr>
-      </p:sp>
-      <p:pic>
-        <p:nvPicPr>
-          <p:cNvPr id="5" name="Image 0" descr="icon_carburst_white.png">    </p:cNvPr>
-          <p:cNvPicPr>
-            <a:picLocks noChangeAspect="1"/>
-          </p:cNvPicPr>
-          <p:nvPr/>
-        </p:nvPicPr>
-        <p:blipFill>
-          <a:blip r:embed="rId1">
-            <a:alphaModFix amt="85000"/>
-          </a:blip>
-          <a:stretch>
-            <a:fillRect/>
-          </a:stretch>
-        </p:blipFill>
-        <p:spPr>
-          <a:xfrm>
-            <a:off x="548640" y="502920"/>
-            <a:ext cx="502920" cy="502920"/>
-          </a:xfrm>
-          <a:prstGeom prst="rect">
-            <a:avLst/>
-          </a:prstGeom>
-        </p:spPr>
-      </p:pic>
-      <p:sp>
-        <p:nvSpPr>
           <p:cNvPr id="6" name="Text 3"/>
           <p:cNvSpPr/>
           <p:nvPr/>
@@ -1344,11 +1019,11 @@
           <a:bodyPr wrap="square" rtlCol="0" anchor="ctr"/>
           <a:lstStyle/>
           <a:p>
-            <a:pPr indent="0" marL="0">
-              <a:buNone/>
-            </a:pPr>
-            <a:r>
-              <a:rPr lang="en-US" sz="1300" b="1" spc="200" kern="0" dirty="0">
+            <a:pPr marL="0" indent="0">
+              <a:buNone/>
+            </a:pPr>
+            <a:r>
+              <a:rPr lang="en-US" sz="1300" b="1" kern="0" spc="200" dirty="0">
                 <a:solidFill>
                   <a:srgbClr val="F5A623"/>
                 </a:solidFill>
@@ -1370,7 +1045,7 @@
         </p:nvSpPr>
         <p:spPr>
           <a:xfrm>
-            <a:off x="548640" y="2286000"/>
+            <a:off x="278184" y="1080022"/>
             <a:ext cx="8778240" cy="2011680"/>
           </a:xfrm>
           <a:prstGeom prst="rect">
@@ -1383,7 +1058,7 @@
           <a:bodyPr wrap="square" rtlCol="0" anchor="t"/>
           <a:lstStyle/>
           <a:p>
-            <a:pPr indent="0" marL="0">
+            <a:pPr marL="0" indent="0">
               <a:lnSpc>
                 <a:spcPct val="108000"/>
               </a:lnSpc>
@@ -1403,7 +1078,7 @@
             <a:endParaRPr lang="en-US" sz="4000" dirty="0"/>
           </a:p>
           <a:p>
-            <a:pPr indent="0" marL="0">
+            <a:pPr marL="0" indent="0">
               <a:lnSpc>
                 <a:spcPct val="108000"/>
               </a:lnSpc>
@@ -1432,7 +1107,7 @@
         </p:nvSpPr>
         <p:spPr>
           <a:xfrm>
-            <a:off x="548640" y="4251960"/>
+            <a:off x="320684" y="2442478"/>
             <a:ext cx="7680960" cy="822960"/>
           </a:xfrm>
           <a:prstGeom prst="rect">
@@ -1445,7 +1120,7 @@
           <a:bodyPr wrap="square" rtlCol="0" anchor="t"/>
           <a:lstStyle/>
           <a:p>
-            <a:pPr indent="0" marL="0">
+            <a:pPr marL="0" indent="0">
               <a:buNone/>
             </a:pPr>
             <a:r>
@@ -1471,8 +1146,8 @@
         </p:nvSpPr>
         <p:spPr>
           <a:xfrm>
-            <a:off x="548640" y="5806440"/>
-            <a:ext cx="1883664" cy="384048"/>
+            <a:off x="2002536" y="3639634"/>
+            <a:ext cx="2765282" cy="677558"/>
           </a:xfrm>
           <a:prstGeom prst="roundRect">
             <a:avLst>
@@ -1498,8 +1173,8 @@
         </p:nvSpPr>
         <p:spPr>
           <a:xfrm>
-            <a:off x="548640" y="5806440"/>
-            <a:ext cx="1883664" cy="384048"/>
+            <a:off x="1993649" y="3639634"/>
+            <a:ext cx="2720018" cy="731520"/>
           </a:xfrm>
           <a:prstGeom prst="rect">
             <a:avLst/>
@@ -1511,11 +1186,11 @@
           <a:bodyPr wrap="square" rtlCol="0" anchor="ctr"/>
           <a:lstStyle/>
           <a:p>
-            <a:pPr algn="ctr" indent="0" marL="0">
-              <a:buNone/>
-            </a:pPr>
-            <a:r>
-              <a:rPr lang="en-US" sz="1050" b="1" dirty="0">
+            <a:pPr marL="0" indent="0" algn="ctr">
+              <a:buNone/>
+            </a:pPr>
+            <a:r>
+              <a:rPr lang="en-US" sz="2400" b="1" dirty="0">
                 <a:solidFill>
                   <a:srgbClr val="2DD4BF"/>
                 </a:solidFill>
@@ -1525,7 +1200,7 @@
               </a:rPr>
               <a:t>ISTAT &amp; SITUAS API</a:t>
             </a:r>
-            <a:endParaRPr lang="en-US" sz="1050" dirty="0"/>
+            <a:endParaRPr lang="en-US" sz="2400" dirty="0"/>
           </a:p>
         </p:txBody>
       </p:sp>
@@ -1537,8 +1212,8 @@
         </p:nvSpPr>
         <p:spPr>
           <a:xfrm>
-            <a:off x="2615184" y="5806440"/>
-            <a:ext cx="2231136" cy="384048"/>
+            <a:off x="6683551" y="3576139"/>
+            <a:ext cx="3709699" cy="987939"/>
           </a:xfrm>
           <a:prstGeom prst="roundRect">
             <a:avLst>
@@ -1564,8 +1239,8 @@
         </p:nvSpPr>
         <p:spPr>
           <a:xfrm>
-            <a:off x="2615184" y="5806440"/>
-            <a:ext cx="2231136" cy="384048"/>
+            <a:off x="6629400" y="3489016"/>
+            <a:ext cx="3861022" cy="1060188"/>
           </a:xfrm>
           <a:prstGeom prst="rect">
             <a:avLst/>
@@ -1577,11 +1252,11 @@
           <a:bodyPr wrap="square" rtlCol="0" anchor="ctr"/>
           <a:lstStyle/>
           <a:p>
-            <a:pPr algn="ctr" indent="0" marL="0">
-              <a:buNone/>
-            </a:pPr>
-            <a:r>
-              <a:rPr lang="en-US" sz="1050" b="1" dirty="0">
+            <a:pPr marL="0" indent="0" algn="ctr">
+              <a:buNone/>
+            </a:pPr>
+            <a:r>
+              <a:rPr lang="en-US" sz="2800" b="1" dirty="0">
                 <a:solidFill>
                   <a:srgbClr val="2DD4BF"/>
                 </a:solidFill>
@@ -1591,7 +1266,7 @@
               </a:rPr>
               <a:t>Python · EDA · K-Means</a:t>
             </a:r>
-            <a:endParaRPr lang="en-US" sz="1050" dirty="0"/>
+            <a:endParaRPr lang="en-US" sz="2800" dirty="0"/>
           </a:p>
         </p:txBody>
       </p:sp>
@@ -1603,8 +1278,8 @@
         </p:nvSpPr>
         <p:spPr>
           <a:xfrm>
-            <a:off x="5029200" y="5806440"/>
-            <a:ext cx="1970532" cy="384048"/>
+            <a:off x="1856259" y="5139636"/>
+            <a:ext cx="3234037" cy="699968"/>
           </a:xfrm>
           <a:prstGeom prst="roundRect">
             <a:avLst>
@@ -1630,8 +1305,8 @@
         </p:nvSpPr>
         <p:spPr>
           <a:xfrm>
-            <a:off x="5029200" y="5806440"/>
-            <a:ext cx="1970532" cy="384048"/>
+            <a:off x="1947852" y="5123860"/>
+            <a:ext cx="3142444" cy="731521"/>
           </a:xfrm>
           <a:prstGeom prst="rect">
             <a:avLst/>
@@ -1643,11 +1318,11 @@
           <a:bodyPr wrap="square" rtlCol="0" anchor="ctr"/>
           <a:lstStyle/>
           <a:p>
-            <a:pPr algn="ctr" indent="0" marL="0">
-              <a:buNone/>
-            </a:pPr>
-            <a:r>
-              <a:rPr lang="en-US" sz="1050" b="1" dirty="0">
+            <a:pPr marL="0" indent="0" algn="ctr">
+              <a:buNone/>
+            </a:pPr>
+            <a:r>
+              <a:rPr lang="en-US" sz="2800" b="1" dirty="0">
                 <a:solidFill>
                   <a:srgbClr val="2DD4BF"/>
                 </a:solidFill>
@@ -1657,7 +1332,7 @@
               </a:rPr>
               <a:t>Regressione Lineare</a:t>
             </a:r>
-            <a:endParaRPr lang="en-US" sz="1050" dirty="0"/>
+            <a:endParaRPr lang="en-US" sz="2800" dirty="0"/>
           </a:p>
         </p:txBody>
       </p:sp>
@@ -1669,8 +1344,8 @@
         </p:nvSpPr>
         <p:spPr>
           <a:xfrm>
-            <a:off x="7182612" y="5806440"/>
-            <a:ext cx="1014984" cy="384048"/>
+            <a:off x="7650050" y="5160175"/>
+            <a:ext cx="1738649" cy="592945"/>
           </a:xfrm>
           <a:prstGeom prst="roundRect">
             <a:avLst>
@@ -1687,6 +1362,13 @@
             <a:prstDash val="solid"/>
           </a:ln>
         </p:spPr>
+        <p:txBody>
+          <a:bodyPr/>
+          <a:lstStyle/>
+          <a:p>
+            <a:endParaRPr lang="en-GB" dirty="0"/>
+          </a:p>
+        </p:txBody>
       </p:sp>
       <p:sp>
         <p:nvSpPr>
@@ -1696,8 +1378,8 @@
         </p:nvSpPr>
         <p:spPr>
           <a:xfrm>
-            <a:off x="7182612" y="5806440"/>
-            <a:ext cx="1014984" cy="384048"/>
+            <a:off x="7101706" y="5101837"/>
+            <a:ext cx="2850608" cy="676141"/>
           </a:xfrm>
           <a:prstGeom prst="rect">
             <a:avLst/>
@@ -1709,11 +1391,11 @@
           <a:bodyPr wrap="square" rtlCol="0" anchor="ctr"/>
           <a:lstStyle/>
           <a:p>
-            <a:pPr algn="ctr" indent="0" marL="0">
-              <a:buNone/>
-            </a:pPr>
-            <a:r>
-              <a:rPr lang="en-US" sz="1050" b="1" dirty="0">
+            <a:pPr marL="0" indent="0" algn="ctr">
+              <a:buNone/>
+            </a:pPr>
+            <a:r>
+              <a:rPr lang="en-US" sz="2800" b="1" dirty="0">
                 <a:solidFill>
                   <a:srgbClr val="2DD4BF"/>
                 </a:solidFill>
@@ -1723,7 +1405,7 @@
               </a:rPr>
               <a:t>Power BI</a:t>
             </a:r>
-            <a:endParaRPr lang="en-US" sz="1050" dirty="0"/>
+            <a:endParaRPr lang="en-US" sz="2800" dirty="0"/>
           </a:p>
         </p:txBody>
       </p:sp>
@@ -1748,7 +1430,7 @@
           <a:bodyPr wrap="square" rtlCol="0" anchor="ctr"/>
           <a:lstStyle/>
           <a:p>
-            <a:pPr algn="l" indent="0" marL="0">
+            <a:pPr marL="0" indent="0" algn="l">
               <a:buNone/>
             </a:pPr>
             <a:r>
@@ -1787,7 +1469,7 @@
           <a:bodyPr wrap="square" rtlCol="0" anchor="ctr"/>
           <a:lstStyle/>
           <a:p>
-            <a:pPr algn="r" indent="0" marL="0">
+            <a:pPr marL="0" indent="0" algn="r">
               <a:buNone/>
             </a:pPr>
             <a:r>
@@ -1821,6 +1503,7 @@
         <a:solidFill>
           <a:srgbClr val="111A26"/>
         </a:solidFill>
+        <a:effectLst/>
       </p:bgPr>
     </p:bg>
     <p:spTree>
@@ -1858,7 +1541,7 @@
           <a:bodyPr wrap="square" rtlCol="0" anchor="ctr"/>
           <a:lstStyle/>
           <a:p>
-            <a:pPr indent="0" marL="0">
+            <a:pPr marL="0" indent="0">
               <a:buNone/>
             </a:pPr>
             <a:r>
@@ -1897,7 +1580,7 @@
           <a:bodyPr wrap="square" rtlCol="0" anchor="ctr"/>
           <a:lstStyle/>
           <a:p>
-            <a:pPr indent="0" marL="0">
+            <a:pPr marL="0" indent="0">
               <a:buNone/>
             </a:pPr>
             <a:r>
@@ -1969,14 +1652,14 @@
       </p:sp>
       <p:pic>
         <p:nvPicPr>
-          <p:cNvPr id="6" name="Image 0" descr="icon_ingest.png">    </p:cNvPr>
+          <p:cNvPr id="6" name="Image 0" descr="icon_ingest.png"/>
           <p:cNvPicPr>
             <a:picLocks noChangeAspect="1"/>
           </p:cNvPicPr>
           <p:nvPr/>
         </p:nvPicPr>
         <p:blipFill>
-          <a:blip r:embed="rId1"/>
+          <a:blip r:embed="rId3"/>
           <a:stretch>
             <a:fillRect/>
           </a:stretch>
@@ -2012,7 +1695,7 @@
           <a:bodyPr wrap="square" rtlCol="0" anchor="ctr"/>
           <a:lstStyle/>
           <a:p>
-            <a:pPr indent="0" marL="0">
+            <a:pPr marL="0" indent="0">
               <a:buNone/>
             </a:pPr>
             <a:r>
@@ -2051,7 +1734,7 @@
           <a:bodyPr wrap="square" rtlCol="0" anchor="t"/>
           <a:lstStyle/>
           <a:p>
-            <a:pPr indent="0" marL="0">
+            <a:pPr marL="0" indent="0">
               <a:lnSpc>
                 <a:spcPct val="115000"/>
               </a:lnSpc>
@@ -2126,14 +1809,14 @@
       </p:sp>
       <p:pic>
         <p:nvPicPr>
-          <p:cNvPr id="11" name="Image 1" descr="icon_shield.png">    </p:cNvPr>
+          <p:cNvPr id="11" name="Image 1" descr="icon_shield.png"/>
           <p:cNvPicPr>
             <a:picLocks noChangeAspect="1"/>
           </p:cNvPicPr>
           <p:nvPr/>
         </p:nvPicPr>
         <p:blipFill>
-          <a:blip r:embed="rId2"/>
+          <a:blip r:embed="rId4"/>
           <a:stretch>
             <a:fillRect/>
           </a:stretch>
@@ -2169,7 +1852,7 @@
           <a:bodyPr wrap="square" rtlCol="0" anchor="ctr"/>
           <a:lstStyle/>
           <a:p>
-            <a:pPr indent="0" marL="0">
+            <a:pPr marL="0" indent="0">
               <a:buNone/>
             </a:pPr>
             <a:r>
@@ -2208,7 +1891,7 @@
           <a:bodyPr wrap="square" rtlCol="0" anchor="t"/>
           <a:lstStyle/>
           <a:p>
-            <a:pPr indent="0" marL="0">
+            <a:pPr marL="0" indent="0">
               <a:lnSpc>
                 <a:spcPct val="115000"/>
               </a:lnSpc>
@@ -2283,14 +1966,14 @@
       </p:sp>
       <p:pic>
         <p:nvPicPr>
-          <p:cNvPr id="16" name="Image 2" descr="icon_merge.png">    </p:cNvPr>
+          <p:cNvPr id="16" name="Image 2" descr="icon_merge.png"/>
           <p:cNvPicPr>
             <a:picLocks noChangeAspect="1"/>
           </p:cNvPicPr>
           <p:nvPr/>
         </p:nvPicPr>
         <p:blipFill>
-          <a:blip r:embed="rId3"/>
+          <a:blip r:embed="rId5"/>
           <a:stretch>
             <a:fillRect/>
           </a:stretch>
@@ -2326,7 +2009,7 @@
           <a:bodyPr wrap="square" rtlCol="0" anchor="ctr"/>
           <a:lstStyle/>
           <a:p>
-            <a:pPr indent="0" marL="0">
+            <a:pPr marL="0" indent="0">
               <a:buNone/>
             </a:pPr>
             <a:r>
@@ -2365,7 +2048,7 @@
           <a:bodyPr wrap="square" rtlCol="0" anchor="t"/>
           <a:lstStyle/>
           <a:p>
-            <a:pPr indent="0" marL="0">
+            <a:pPr marL="0" indent="0">
               <a:lnSpc>
                 <a:spcPct val="115000"/>
               </a:lnSpc>
@@ -2440,14 +2123,14 @@
       </p:sp>
       <p:pic>
         <p:nvPicPr>
-          <p:cNvPr id="21" name="Image 3" descr="icon_filter.png">    </p:cNvPr>
+          <p:cNvPr id="21" name="Image 3" descr="icon_filter.png"/>
           <p:cNvPicPr>
             <a:picLocks noChangeAspect="1"/>
           </p:cNvPicPr>
           <p:nvPr/>
         </p:nvPicPr>
         <p:blipFill>
-          <a:blip r:embed="rId4"/>
+          <a:blip r:embed="rId6"/>
           <a:stretch>
             <a:fillRect/>
           </a:stretch>
@@ -2483,7 +2166,7 @@
           <a:bodyPr wrap="square" rtlCol="0" anchor="ctr"/>
           <a:lstStyle/>
           <a:p>
-            <a:pPr indent="0" marL="0">
+            <a:pPr marL="0" indent="0">
               <a:buNone/>
             </a:pPr>
             <a:r>
@@ -2522,7 +2205,7 @@
           <a:bodyPr wrap="square" rtlCol="0" anchor="t"/>
           <a:lstStyle/>
           <a:p>
-            <a:pPr indent="0" marL="0">
+            <a:pPr marL="0" indent="0">
               <a:lnSpc>
                 <a:spcPct val="115000"/>
               </a:lnSpc>
@@ -2564,7 +2247,7 @@
           <a:bodyPr wrap="square" rtlCol="0" anchor="ctr"/>
           <a:lstStyle/>
           <a:p>
-            <a:pPr algn="l" indent="0" marL="0">
+            <a:pPr marL="0" indent="0" algn="l">
               <a:buNone/>
             </a:pPr>
             <a:r>
@@ -2603,7 +2286,7 @@
           <a:bodyPr wrap="square" rtlCol="0" anchor="ctr"/>
           <a:lstStyle/>
           <a:p>
-            <a:pPr algn="r" indent="0" marL="0">
+            <a:pPr marL="0" indent="0" algn="r">
               <a:buNone/>
             </a:pPr>
             <a:r>
@@ -2637,6 +2320,7 @@
         <a:solidFill>
           <a:srgbClr val="F4F6F8"/>
         </a:solidFill>
+        <a:effectLst/>
       </p:bgPr>
     </p:bg>
     <p:spTree>
@@ -2674,7 +2358,7 @@
           <a:bodyPr wrap="square" rtlCol="0" anchor="ctr"/>
           <a:lstStyle/>
           <a:p>
-            <a:pPr indent="0" marL="0">
+            <a:pPr marL="0" indent="0">
               <a:buNone/>
             </a:pPr>
             <a:r>
@@ -2716,14 +2400,14 @@
       </p:sp>
       <p:pic>
         <p:nvPicPr>
-          <p:cNvPr id="4" name="Image 0" descr="icon_alert.png">    </p:cNvPr>
+          <p:cNvPr id="4" name="Image 0" descr="icon_alert.png"/>
           <p:cNvPicPr>
             <a:picLocks noChangeAspect="1"/>
           </p:cNvPicPr>
           <p:nvPr/>
         </p:nvPicPr>
         <p:blipFill>
-          <a:blip r:embed="rId1"/>
+          <a:blip r:embed="rId3"/>
           <a:stretch>
             <a:fillRect/>
           </a:stretch>
@@ -2759,7 +2443,7 @@
           <a:bodyPr wrap="square" rtlCol="0" anchor="ctr"/>
           <a:lstStyle/>
           <a:p>
-            <a:pPr indent="0" marL="0">
+            <a:pPr marL="0" indent="0">
               <a:buNone/>
             </a:pPr>
             <a:r>
@@ -2798,7 +2482,7 @@
           <a:bodyPr wrap="square" rtlCol="0" anchor="ctr"/>
           <a:lstStyle/>
           <a:p>
-            <a:pPr indent="0" marL="0">
+            <a:pPr marL="0" indent="0">
               <a:lnSpc>
                 <a:spcPct val="120000"/>
               </a:lnSpc>
@@ -2844,14 +2528,14 @@
       </p:sp>
       <p:pic>
         <p:nvPicPr>
-          <p:cNvPr id="8" name="Image 1" descr="icon_target.png">    </p:cNvPr>
+          <p:cNvPr id="8" name="Image 1" descr="icon_target.png"/>
           <p:cNvPicPr>
             <a:picLocks noChangeAspect="1"/>
           </p:cNvPicPr>
           <p:nvPr/>
         </p:nvPicPr>
         <p:blipFill>
-          <a:blip r:embed="rId2"/>
+          <a:blip r:embed="rId4"/>
           <a:stretch>
             <a:fillRect/>
           </a:stretch>
@@ -2887,7 +2571,7 @@
           <a:bodyPr wrap="square" rtlCol="0" anchor="ctr"/>
           <a:lstStyle/>
           <a:p>
-            <a:pPr indent="0" marL="0">
+            <a:pPr marL="0" indent="0">
               <a:buNone/>
             </a:pPr>
             <a:r>
@@ -2926,7 +2610,7 @@
           <a:bodyPr wrap="square" rtlCol="0" anchor="ctr"/>
           <a:lstStyle/>
           <a:p>
-            <a:pPr indent="0" marL="0">
+            <a:pPr marL="0" indent="0">
               <a:lnSpc>
                 <a:spcPct val="120000"/>
               </a:lnSpc>
@@ -2968,7 +2652,7 @@
           <a:bodyPr wrap="square" rtlCol="0" anchor="t"/>
           <a:lstStyle/>
           <a:p>
-            <a:pPr indent="0" marL="0">
+            <a:pPr marL="0" indent="0">
               <a:buNone/>
             </a:pPr>
             <a:r>
@@ -3007,11 +2691,11 @@
           <a:bodyPr wrap="square" rtlCol="0" anchor="ctr"/>
           <a:lstStyle/>
           <a:p>
-            <a:pPr indent="0" marL="0">
-              <a:buNone/>
-            </a:pPr>
-            <a:r>
-              <a:rPr lang="en-US" sz="1300" b="1" spc="100" kern="0" dirty="0">
+            <a:pPr marL="0" indent="0">
+              <a:buNone/>
+            </a:pPr>
+            <a:r>
+              <a:rPr lang="en-US" sz="1300" b="1" kern="0" spc="100" dirty="0">
                 <a:solidFill>
                   <a:srgbClr val="51606E"/>
                 </a:solidFill>
@@ -3074,14 +2758,14 @@
       </p:sp>
       <p:pic>
         <p:nvPicPr>
-          <p:cNvPr id="15" name="Image 2" descr="icon_users.png">    </p:cNvPr>
+          <p:cNvPr id="15" name="Image 2" descr="icon_users.png"/>
           <p:cNvPicPr>
             <a:picLocks noChangeAspect="1"/>
           </p:cNvPicPr>
           <p:nvPr/>
         </p:nvPicPr>
         <p:blipFill>
-          <a:blip r:embed="rId3"/>
+          <a:blip r:embed="rId5"/>
           <a:stretch>
             <a:fillRect/>
           </a:stretch>
@@ -3117,7 +2801,7 @@
           <a:bodyPr wrap="square" rtlCol="0" anchor="ctr"/>
           <a:lstStyle/>
           <a:p>
-            <a:pPr indent="0" marL="0">
+            <a:pPr marL="0" indent="0">
               <a:buNone/>
             </a:pPr>
             <a:r>
@@ -3156,7 +2840,7 @@
           <a:bodyPr wrap="square" rtlCol="0" anchor="ctr"/>
           <a:lstStyle/>
           <a:p>
-            <a:pPr indent="0" marL="0">
+            <a:pPr marL="0" indent="0">
               <a:lnSpc>
                 <a:spcPct val="120000"/>
               </a:lnSpc>
@@ -3226,14 +2910,14 @@
       </p:sp>
       <p:pic>
         <p:nvPicPr>
-          <p:cNvPr id="20" name="Image 3" descr="icon_location.png">    </p:cNvPr>
+          <p:cNvPr id="20" name="Image 3" descr="icon_location.png"/>
           <p:cNvPicPr>
             <a:picLocks noChangeAspect="1"/>
           </p:cNvPicPr>
           <p:nvPr/>
         </p:nvPicPr>
         <p:blipFill>
-          <a:blip r:embed="rId4"/>
+          <a:blip r:embed="rId6"/>
           <a:stretch>
             <a:fillRect/>
           </a:stretch>
@@ -3269,7 +2953,7 @@
           <a:bodyPr wrap="square" rtlCol="0" anchor="ctr"/>
           <a:lstStyle/>
           <a:p>
-            <a:pPr indent="0" marL="0">
+            <a:pPr marL="0" indent="0">
               <a:buNone/>
             </a:pPr>
             <a:r>
@@ -3308,7 +2992,7 @@
           <a:bodyPr wrap="square" rtlCol="0" anchor="ctr"/>
           <a:lstStyle/>
           <a:p>
-            <a:pPr indent="0" marL="0">
+            <a:pPr marL="0" indent="0">
               <a:lnSpc>
                 <a:spcPct val="120000"/>
               </a:lnSpc>
@@ -3350,7 +3034,7 @@
           <a:bodyPr wrap="square" rtlCol="0" anchor="ctr"/>
           <a:lstStyle/>
           <a:p>
-            <a:pPr algn="l" indent="0" marL="0">
+            <a:pPr marL="0" indent="0" algn="l">
               <a:buNone/>
             </a:pPr>
             <a:r>
@@ -3389,7 +3073,7 @@
           <a:bodyPr wrap="square" rtlCol="0" anchor="ctr"/>
           <a:lstStyle/>
           <a:p>
-            <a:pPr algn="r" indent="0" marL="0">
+            <a:pPr marL="0" indent="0" algn="r">
               <a:buNone/>
             </a:pPr>
             <a:r>
@@ -3423,6 +3107,7 @@
         <a:solidFill>
           <a:srgbClr val="111A26"/>
         </a:solidFill>
+        <a:effectLst/>
       </p:bgPr>
     </p:bg>
     <p:spTree>
@@ -3460,7 +3145,7 @@
           <a:bodyPr wrap="square" rtlCol="0" anchor="ctr"/>
           <a:lstStyle/>
           <a:p>
-            <a:pPr indent="0" marL="0">
+            <a:pPr marL="0" indent="0">
               <a:buNone/>
             </a:pPr>
             <a:r>
@@ -3499,7 +3184,7 @@
           <a:bodyPr wrap="square" rtlCol="0" anchor="ctr"/>
           <a:lstStyle/>
           <a:p>
-            <a:pPr indent="0" marL="0">
+            <a:pPr marL="0" indent="0">
               <a:buNone/>
             </a:pPr>
             <a:r>
@@ -3541,15 +3226,15 @@
       </p:sp>
       <p:pic>
         <p:nvPicPr>
-          <p:cNvPr id="5" name="Image 0" descr="unpacked/ppt/media/image1.png">    </p:cNvPr>
+          <p:cNvPr id="5" name="Image 0" descr="unpacked/ppt/media/image1.png"/>
           <p:cNvPicPr>
             <a:picLocks noChangeAspect="1"/>
           </p:cNvPicPr>
           <p:nvPr/>
         </p:nvPicPr>
         <p:blipFill>
-          <a:blip r:embed="rId1"/>
-          <a:srcRect l="0" r="0" t="0" b="0"/>
+          <a:blip r:embed="rId3"/>
+          <a:srcRect/>
           <a:stretch/>
         </p:blipFill>
         <p:spPr>
@@ -3564,62 +3249,13 @@
       </p:pic>
       <p:sp>
         <p:nvSpPr>
-          <p:cNvPr id="6" name="Shape 3"/>
-          <p:cNvSpPr/>
-          <p:nvPr/>
-        </p:nvSpPr>
-        <p:spPr>
-          <a:xfrm>
-            <a:off x="6903720" y="1691640"/>
-            <a:ext cx="457200" cy="457200"/>
-          </a:xfrm>
-          <a:prstGeom prst="ellipse">
-            <a:avLst/>
-          </a:prstGeom>
-          <a:solidFill>
-            <a:srgbClr val="22303F"/>
-          </a:solidFill>
-          <a:ln w="12700">
-            <a:solidFill>
-              <a:srgbClr val="324459"/>
-            </a:solidFill>
-            <a:prstDash val="solid"/>
-          </a:ln>
-        </p:spPr>
-      </p:sp>
-      <p:pic>
-        <p:nvPicPr>
-          <p:cNvPr id="7" name="Image 1" descr="icon_scale.png">    </p:cNvPr>
-          <p:cNvPicPr>
-            <a:picLocks noChangeAspect="1"/>
-          </p:cNvPicPr>
-          <p:nvPr/>
-        </p:nvPicPr>
-        <p:blipFill>
-          <a:blip r:embed="rId2"/>
-          <a:stretch>
-            <a:fillRect/>
-          </a:stretch>
-        </p:blipFill>
-        <p:spPr>
-          <a:xfrm>
-            <a:off x="7013448" y="1801368"/>
-            <a:ext cx="237744" cy="237744"/>
-          </a:xfrm>
-          <a:prstGeom prst="rect">
-            <a:avLst/>
-          </a:prstGeom>
-        </p:spPr>
-      </p:pic>
-      <p:sp>
-        <p:nvSpPr>
           <p:cNvPr id="8" name="Text 4"/>
           <p:cNvSpPr/>
           <p:nvPr/>
         </p:nvSpPr>
         <p:spPr>
           <a:xfrm>
-            <a:off x="7525512" y="1664208"/>
+            <a:off x="7214616" y="1560275"/>
             <a:ext cx="4087368" cy="685800"/>
           </a:xfrm>
           <a:prstGeom prst="rect">
@@ -3632,14 +3268,14 @@
           <a:bodyPr wrap="square" rtlCol="0" anchor="t"/>
           <a:lstStyle/>
           <a:p>
-            <a:pPr indent="0" marL="0">
+            <a:pPr marL="0" indent="0">
               <a:lnSpc>
                 <a:spcPct val="118000"/>
               </a:lnSpc>
               <a:buNone/>
             </a:pPr>
             <a:r>
-              <a:rPr lang="en-US" sz="1250" dirty="0">
+              <a:rPr lang="en-US" sz="1400" dirty="0">
                 <a:solidFill>
                   <a:srgbClr val="9FB0C0"/>
                 </a:solidFill>
@@ -3649,59 +3285,10 @@
               </a:rPr>
               <a:t>Standardizzazione delle feature tramite StandardScaler, per equilibrare i pesi geometrici tra tasso pro capite e densità.</a:t>
             </a:r>
-            <a:endParaRPr lang="en-US" sz="1250" dirty="0"/>
-          </a:p>
-        </p:txBody>
-      </p:sp>
-      <p:sp>
-        <p:nvSpPr>
-          <p:cNvPr id="9" name="Shape 5"/>
-          <p:cNvSpPr/>
-          <p:nvPr/>
-        </p:nvSpPr>
-        <p:spPr>
-          <a:xfrm>
-            <a:off x="6903720" y="2560320"/>
-            <a:ext cx="457200" cy="457200"/>
-          </a:xfrm>
-          <a:prstGeom prst="ellipse">
-            <a:avLst/>
-          </a:prstGeom>
-          <a:solidFill>
-            <a:srgbClr val="22303F"/>
-          </a:solidFill>
-          <a:ln w="12700">
-            <a:solidFill>
-              <a:srgbClr val="324459"/>
-            </a:solidFill>
-            <a:prstDash val="solid"/>
-          </a:ln>
-        </p:spPr>
-      </p:sp>
-      <p:pic>
-        <p:nvPicPr>
-          <p:cNvPr id="10" name="Image 2" descr="icon_diagram.png">    </p:cNvPr>
-          <p:cNvPicPr>
-            <a:picLocks noChangeAspect="1"/>
-          </p:cNvPicPr>
-          <p:nvPr/>
-        </p:nvPicPr>
-        <p:blipFill>
-          <a:blip r:embed="rId3"/>
-          <a:stretch>
-            <a:fillRect/>
-          </a:stretch>
-        </p:blipFill>
-        <p:spPr>
-          <a:xfrm>
-            <a:off x="7013448" y="2670048"/>
-            <a:ext cx="237744" cy="237744"/>
-          </a:xfrm>
-          <a:prstGeom prst="rect">
-            <a:avLst/>
-          </a:prstGeom>
-        </p:spPr>
-      </p:pic>
+            <a:endParaRPr lang="en-US" sz="1400" dirty="0"/>
+          </a:p>
+        </p:txBody>
+      </p:sp>
       <p:sp>
         <p:nvSpPr>
           <p:cNvPr id="11" name="Text 6"/>
@@ -3710,7 +3297,7 @@
         </p:nvSpPr>
         <p:spPr>
           <a:xfrm>
-            <a:off x="7525512" y="2532888"/>
+            <a:off x="7214616" y="2489550"/>
             <a:ext cx="4087368" cy="685800"/>
           </a:xfrm>
           <a:prstGeom prst="rect">
@@ -3723,14 +3310,14 @@
           <a:bodyPr wrap="square" rtlCol="0" anchor="t"/>
           <a:lstStyle/>
           <a:p>
-            <a:pPr indent="0" marL="0">
+            <a:pPr marL="0" indent="0">
               <a:lnSpc>
                 <a:spcPct val="118000"/>
               </a:lnSpc>
               <a:buNone/>
             </a:pPr>
             <a:r>
-              <a:rPr lang="en-US" sz="1250" dirty="0">
+              <a:rPr lang="en-US" sz="1400" dirty="0">
                 <a:solidFill>
                   <a:srgbClr val="9FB0C0"/>
                 </a:solidFill>
@@ -3740,59 +3327,10 @@
               </a:rPr>
               <a:t>Modello K-Means addestrato su 3 cluster fisici di rischio (Basso, Medio, Alto), escludendo i comuni sotto i 500 abitanti.</a:t>
             </a:r>
-            <a:endParaRPr lang="en-US" sz="1250" dirty="0"/>
-          </a:p>
-        </p:txBody>
-      </p:sp>
-      <p:sp>
-        <p:nvSpPr>
-          <p:cNvPr id="12" name="Shape 7"/>
-          <p:cNvSpPr/>
-          <p:nvPr/>
-        </p:nvSpPr>
-        <p:spPr>
-          <a:xfrm>
-            <a:off x="6903720" y="3429000"/>
-            <a:ext cx="457200" cy="457200"/>
-          </a:xfrm>
-          <a:prstGeom prst="ellipse">
-            <a:avLst/>
-          </a:prstGeom>
-          <a:solidFill>
-            <a:srgbClr val="22303F"/>
-          </a:solidFill>
-          <a:ln w="12700">
-            <a:solidFill>
-              <a:srgbClr val="324459"/>
-            </a:solidFill>
-            <a:prstDash val="solid"/>
-          </a:ln>
-        </p:spPr>
-      </p:sp>
-      <p:pic>
-        <p:nvPicPr>
-          <p:cNvPr id="13" name="Image 3" descr="icon_chartline.png">    </p:cNvPr>
-          <p:cNvPicPr>
-            <a:picLocks noChangeAspect="1"/>
-          </p:cNvPicPr>
-          <p:nvPr/>
-        </p:nvPicPr>
-        <p:blipFill>
-          <a:blip r:embed="rId4"/>
-          <a:stretch>
-            <a:fillRect/>
-          </a:stretch>
-        </p:blipFill>
-        <p:spPr>
-          <a:xfrm>
-            <a:off x="7013448" y="3538728"/>
-            <a:ext cx="237744" cy="237744"/>
-          </a:xfrm>
-          <a:prstGeom prst="rect">
-            <a:avLst/>
-          </a:prstGeom>
-        </p:spPr>
-      </p:pic>
+            <a:endParaRPr lang="en-US" sz="1400" dirty="0"/>
+          </a:p>
+        </p:txBody>
+      </p:sp>
       <p:sp>
         <p:nvSpPr>
           <p:cNvPr id="14" name="Text 8"/>
@@ -3801,7 +3339,7 @@
         </p:nvSpPr>
         <p:spPr>
           <a:xfrm>
-            <a:off x="7525512" y="3401568"/>
+            <a:off x="7214616" y="3429000"/>
             <a:ext cx="4087368" cy="685800"/>
           </a:xfrm>
           <a:prstGeom prst="rect">
@@ -3814,14 +3352,14 @@
           <a:bodyPr wrap="square" rtlCol="0" anchor="t"/>
           <a:lstStyle/>
           <a:p>
-            <a:pPr indent="0" marL="0">
+            <a:pPr marL="0" indent="0">
               <a:lnSpc>
                 <a:spcPct val="118000"/>
               </a:lnSpc>
               <a:buNone/>
             </a:pPr>
             <a:r>
-              <a:rPr lang="en-US" sz="1250" dirty="0">
+              <a:rPr lang="en-US" sz="1400" dirty="0">
                 <a:solidFill>
                   <a:srgbClr val="9FB0C0"/>
                 </a:solidFill>
@@ -3831,7 +3369,7 @@
               </a:rPr>
               <a:t>Mappatura logaritmica sull'asse Y per gestire la forte asimmetria dei centri urbani più popolosi.</a:t>
             </a:r>
-            <a:endParaRPr lang="en-US" sz="1250" dirty="0"/>
+            <a:endParaRPr lang="en-US" sz="1400" dirty="0"/>
           </a:p>
         </p:txBody>
       </p:sp>
@@ -3856,11 +3394,11 @@
           <a:bodyPr wrap="square" rtlCol="0" anchor="ctr"/>
           <a:lstStyle/>
           <a:p>
-            <a:pPr indent="0" marL="0">
-              <a:buNone/>
-            </a:pPr>
-            <a:r>
-              <a:rPr lang="en-US" sz="1150" b="1" spc="150" kern="0" dirty="0">
+            <a:pPr marL="0" indent="0">
+              <a:buNone/>
+            </a:pPr>
+            <a:r>
+              <a:rPr lang="en-US" sz="1150" b="1" kern="0" spc="150" dirty="0">
                 <a:solidFill>
                   <a:srgbClr val="9FB0C0"/>
                 </a:solidFill>
@@ -3922,7 +3460,7 @@
           <a:bodyPr wrap="square" rtlCol="0" anchor="ctr"/>
           <a:lstStyle/>
           <a:p>
-            <a:pPr algn="ctr" indent="0" marL="0">
+            <a:pPr marL="0" indent="0" algn="ctr">
               <a:buNone/>
             </a:pPr>
             <a:r>
@@ -3961,7 +3499,7 @@
           <a:bodyPr wrap="square" rtlCol="0" anchor="ctr"/>
           <a:lstStyle/>
           <a:p>
-            <a:pPr algn="ctr" indent="0" marL="0">
+            <a:pPr marL="0" indent="0" algn="ctr">
               <a:lnSpc>
                 <a:spcPct val="110000"/>
               </a:lnSpc>
@@ -4030,7 +3568,7 @@
           <a:bodyPr wrap="square" rtlCol="0" anchor="ctr"/>
           <a:lstStyle/>
           <a:p>
-            <a:pPr algn="ctr" indent="0" marL="0">
+            <a:pPr marL="0" indent="0" algn="ctr">
               <a:buNone/>
             </a:pPr>
             <a:r>
@@ -4069,7 +3607,7 @@
           <a:bodyPr wrap="square" rtlCol="0" anchor="ctr"/>
           <a:lstStyle/>
           <a:p>
-            <a:pPr algn="ctr" indent="0" marL="0">
+            <a:pPr marL="0" indent="0" algn="ctr">
               <a:lnSpc>
                 <a:spcPct val="110000"/>
               </a:lnSpc>
@@ -4138,7 +3676,7 @@
           <a:bodyPr wrap="square" rtlCol="0" anchor="ctr"/>
           <a:lstStyle/>
           <a:p>
-            <a:pPr algn="ctr" indent="0" marL="0">
+            <a:pPr marL="0" indent="0" algn="ctr">
               <a:buNone/>
             </a:pPr>
             <a:r>
@@ -4177,7 +3715,7 @@
           <a:bodyPr wrap="square" rtlCol="0" anchor="ctr"/>
           <a:lstStyle/>
           <a:p>
-            <a:pPr algn="ctr" indent="0" marL="0">
+            <a:pPr marL="0" indent="0" algn="ctr">
               <a:lnSpc>
                 <a:spcPct val="110000"/>
               </a:lnSpc>
@@ -4219,7 +3757,7 @@
           <a:bodyPr wrap="square" rtlCol="0" anchor="ctr"/>
           <a:lstStyle/>
           <a:p>
-            <a:pPr algn="l" indent="0" marL="0">
+            <a:pPr marL="0" indent="0" algn="l">
               <a:buNone/>
             </a:pPr>
             <a:r>
@@ -4258,7 +3796,7 @@
           <a:bodyPr wrap="square" rtlCol="0" anchor="ctr"/>
           <a:lstStyle/>
           <a:p>
-            <a:pPr algn="r" indent="0" marL="0">
+            <a:pPr marL="0" indent="0" algn="r">
               <a:buNone/>
             </a:pPr>
             <a:r>
@@ -4292,6 +3830,7 @@
         <a:solidFill>
           <a:srgbClr val="111A26"/>
         </a:solidFill>
+        <a:effectLst/>
       </p:bgPr>
     </p:bg>
     <p:spTree>
@@ -4351,7 +3890,7 @@
           <a:bodyPr wrap="square" rtlCol="0" anchor="ctr"/>
           <a:lstStyle/>
           <a:p>
-            <a:pPr indent="0" marL="0">
+            <a:pPr marL="0" indent="0">
               <a:buNone/>
             </a:pPr>
             <a:r>
@@ -4390,7 +3929,7 @@
           <a:bodyPr wrap="square" rtlCol="0" anchor="ctr"/>
           <a:lstStyle/>
           <a:p>
-            <a:pPr indent="0" marL="0">
+            <a:pPr marL="0" indent="0">
               <a:buNone/>
             </a:pPr>
             <a:r>
@@ -4456,11 +3995,11 @@
           <a:bodyPr wrap="square" rtlCol="0" anchor="ctr"/>
           <a:lstStyle/>
           <a:p>
-            <a:pPr indent="0" marL="0">
-              <a:buNone/>
-            </a:pPr>
-            <a:r>
-              <a:rPr lang="en-US" sz="1200" b="1" spc="150" kern="0" dirty="0">
+            <a:pPr marL="0" indent="0">
+              <a:buNone/>
+            </a:pPr>
+            <a:r>
+              <a:rPr lang="en-US" sz="1200" b="1" kern="0" spc="150" dirty="0">
                 <a:solidFill>
                   <a:srgbClr val="9FB0C0"/>
                 </a:solidFill>
@@ -4495,7 +4034,7 @@
           <a:bodyPr wrap="square" rtlCol="0" anchor="ctr"/>
           <a:lstStyle/>
           <a:p>
-            <a:pPr indent="0" marL="0">
+            <a:pPr marL="0" indent="0">
               <a:buNone/>
             </a:pPr>
             <a:r>
@@ -4534,7 +4073,7 @@
           <a:bodyPr wrap="square" rtlCol="0" anchor="ctr"/>
           <a:lstStyle/>
           <a:p>
-            <a:pPr indent="0" marL="0">
+            <a:pPr marL="0" indent="0">
               <a:lnSpc>
                 <a:spcPct val="120000"/>
               </a:lnSpc>
@@ -4580,14 +4119,14 @@
       </p:sp>
       <p:pic>
         <p:nvPicPr>
-          <p:cNvPr id="10" name="Image 0" descr="icon_chartline.png">    </p:cNvPr>
+          <p:cNvPr id="10" name="Image 0" descr="icon_chartline.png"/>
           <p:cNvPicPr>
             <a:picLocks noChangeAspect="1"/>
           </p:cNvPicPr>
           <p:nvPr/>
         </p:nvPicPr>
         <p:blipFill>
-          <a:blip r:embed="rId1"/>
+          <a:blip r:embed="rId3"/>
           <a:stretch>
             <a:fillRect/>
           </a:stretch>
@@ -4623,7 +4162,7 @@
           <a:bodyPr wrap="square" rtlCol="0" anchor="ctr"/>
           <a:lstStyle/>
           <a:p>
-            <a:pPr indent="0" marL="0">
+            <a:pPr marL="0" indent="0">
               <a:lnSpc>
                 <a:spcPct val="115000"/>
               </a:lnSpc>
@@ -4698,14 +4237,14 @@
       </p:sp>
       <p:pic>
         <p:nvPicPr>
-          <p:cNvPr id="14" name="Image 1" descr="icon_target.png">    </p:cNvPr>
+          <p:cNvPr id="14" name="Image 1" descr="icon_target.png"/>
           <p:cNvPicPr>
             <a:picLocks noChangeAspect="1"/>
           </p:cNvPicPr>
           <p:nvPr/>
         </p:nvPicPr>
         <p:blipFill>
-          <a:blip r:embed="rId2"/>
+          <a:blip r:embed="rId4"/>
           <a:stretch>
             <a:fillRect/>
           </a:stretch>
@@ -4741,7 +4280,7 @@
           <a:bodyPr wrap="square" rtlCol="0" anchor="ctr"/>
           <a:lstStyle/>
           <a:p>
-            <a:pPr indent="0" marL="0">
+            <a:pPr marL="0" indent="0">
               <a:buNone/>
             </a:pPr>
             <a:r>
@@ -4780,7 +4319,7 @@
           <a:bodyPr wrap="square" rtlCol="0" anchor="ctr"/>
           <a:lstStyle/>
           <a:p>
-            <a:pPr indent="0" marL="0">
+            <a:pPr marL="0" indent="0">
               <a:lnSpc>
                 <a:spcPct val="120000"/>
               </a:lnSpc>
@@ -4855,14 +4394,14 @@
       </p:sp>
       <p:pic>
         <p:nvPicPr>
-          <p:cNvPr id="19" name="Image 2" descr="icon_briefcase.png">    </p:cNvPr>
+          <p:cNvPr id="19" name="Image 2" descr="icon_briefcase.png"/>
           <p:cNvPicPr>
             <a:picLocks noChangeAspect="1"/>
           </p:cNvPicPr>
           <p:nvPr/>
         </p:nvPicPr>
         <p:blipFill>
-          <a:blip r:embed="rId3"/>
+          <a:blip r:embed="rId5"/>
           <a:stretch>
             <a:fillRect/>
           </a:stretch>
@@ -4898,7 +4437,7 @@
           <a:bodyPr wrap="square" rtlCol="0" anchor="ctr"/>
           <a:lstStyle/>
           <a:p>
-            <a:pPr indent="0" marL="0">
+            <a:pPr marL="0" indent="0">
               <a:buNone/>
             </a:pPr>
             <a:r>
@@ -4937,7 +4476,7 @@
           <a:bodyPr wrap="square" rtlCol="0" anchor="ctr"/>
           <a:lstStyle/>
           <a:p>
-            <a:pPr indent="0" marL="0">
+            <a:pPr marL="0" indent="0">
               <a:lnSpc>
                 <a:spcPct val="120000"/>
               </a:lnSpc>
@@ -4979,7 +4518,7 @@
           <a:bodyPr wrap="square" rtlCol="0" anchor="t"/>
           <a:lstStyle/>
           <a:p>
-            <a:pPr indent="0" marL="0">
+            <a:pPr marL="0" indent="0">
               <a:buNone/>
             </a:pPr>
             <a:r>
@@ -5018,7 +4557,7 @@
           <a:bodyPr wrap="square" rtlCol="0" anchor="ctr"/>
           <a:lstStyle/>
           <a:p>
-            <a:pPr algn="l" indent="0" marL="0">
+            <a:pPr marL="0" indent="0" algn="l">
               <a:buNone/>
             </a:pPr>
             <a:r>
@@ -5057,7 +4596,7 @@
           <a:bodyPr wrap="square" rtlCol="0" anchor="ctr"/>
           <a:lstStyle/>
           <a:p>
-            <a:pPr algn="r" indent="0" marL="0">
+            <a:pPr marL="0" indent="0" algn="r">
               <a:buNone/>
             </a:pPr>
             <a:r>
@@ -5376,4 +4915,299 @@
     </a:ext>
   </a:extLst>
 </a:theme>
+</file>
+
+<file path=ppt/theme/theme2.xml><?xml version="1.0" encoding="utf-8"?>
+<a:theme xmlns:a="http://schemas.openxmlformats.org/drawingml/2006/main" name="Office Theme">
+  <a:themeElements>
+    <a:clrScheme name="Office">
+      <a:dk1>
+        <a:sysClr val="windowText" lastClr="000000"/>
+      </a:dk1>
+      <a:lt1>
+        <a:sysClr val="window" lastClr="FFFFFF"/>
+      </a:lt1>
+      <a:dk2>
+        <a:srgbClr val="44546A"/>
+      </a:dk2>
+      <a:lt2>
+        <a:srgbClr val="E7E6E6"/>
+      </a:lt2>
+      <a:accent1>
+        <a:srgbClr val="4472C4"/>
+      </a:accent1>
+      <a:accent2>
+        <a:srgbClr val="ED7D31"/>
+      </a:accent2>
+      <a:accent3>
+        <a:srgbClr val="A5A5A5"/>
+      </a:accent3>
+      <a:accent4>
+        <a:srgbClr val="FFC000"/>
+      </a:accent4>
+      <a:accent5>
+        <a:srgbClr val="5B9BD5"/>
+      </a:accent5>
+      <a:accent6>
+        <a:srgbClr val="70AD47"/>
+      </a:accent6>
+      <a:hlink>
+        <a:srgbClr val="0563C1"/>
+      </a:hlink>
+      <a:folHlink>
+        <a:srgbClr val="954F72"/>
+      </a:folHlink>
+    </a:clrScheme>
+    <a:fontScheme name="Office">
+      <a:majorFont>
+        <a:latin typeface="Calibri Light" panose="020F0302020204030204"/>
+        <a:ea typeface=""/>
+        <a:cs typeface=""/>
+        <a:font script="Jpan" typeface="游ゴシック Light"/>
+        <a:font script="Hang" typeface="맑은 고딕"/>
+        <a:font script="Hans" typeface="等线 Light"/>
+        <a:font script="Hant" typeface="新細明體"/>
+        <a:font script="Arab" typeface="Times New Roman"/>
+        <a:font script="Hebr" typeface="Times New Roman"/>
+        <a:font script="Thai" typeface="Angsana New"/>
+        <a:font script="Ethi" typeface="Nyala"/>
+        <a:font script="Beng" typeface="Vrinda"/>
+        <a:font script="Gujr" typeface="Shruti"/>
+        <a:font script="Khmr" typeface="MoolBoran"/>
+        <a:font script="Knda" typeface="Tunga"/>
+        <a:font script="Guru" typeface="Raavi"/>
+        <a:font script="Cans" typeface="Euphemia"/>
+        <a:font script="Cher" typeface="Plantagenet Cherokee"/>
+        <a:font script="Yiii" typeface="Microsoft Yi Baiti"/>
+        <a:font script="Tibt" typeface="Microsoft Himalaya"/>
+        <a:font script="Thaa" typeface="MV Boli"/>
+        <a:font script="Deva" typeface="Mangal"/>
+        <a:font script="Telu" typeface="Gautami"/>
+        <a:font script="Taml" typeface="Latha"/>
+        <a:font script="Syrc" typeface="Estrangelo Edessa"/>
+        <a:font script="Orya" typeface="Kalinga"/>
+        <a:font script="Mlym" typeface="Kartika"/>
+        <a:font script="Laoo" typeface="DokChampa"/>
+        <a:font script="Sinh" typeface="Iskoola Pota"/>
+        <a:font script="Mong" typeface="Mongolian Baiti"/>
+        <a:font script="Viet" typeface="Times New Roman"/>
+        <a:font script="Uigh" typeface="Microsoft Uighur"/>
+        <a:font script="Geor" typeface="Sylfaen"/>
+        <a:font script="Armn" typeface="Arial"/>
+        <a:font script="Bugi" typeface="Leelawadee UI"/>
+        <a:font script="Bopo" typeface="Microsoft JhengHei"/>
+        <a:font script="Java" typeface="Javanese Text"/>
+        <a:font script="Lisu" typeface="Segoe UI"/>
+        <a:font script="Mymr" typeface="Myanmar Text"/>
+        <a:font script="Nkoo" typeface="Ebrima"/>
+        <a:font script="Olck" typeface="Nirmala UI"/>
+        <a:font script="Osma" typeface="Ebrima"/>
+        <a:font script="Phag" typeface="Phagspa"/>
+        <a:font script="Syrn" typeface="Estrangelo Edessa"/>
+        <a:font script="Syrj" typeface="Estrangelo Edessa"/>
+        <a:font script="Syre" typeface="Estrangelo Edessa"/>
+        <a:font script="Sora" typeface="Nirmala UI"/>
+        <a:font script="Tale" typeface="Microsoft Tai Le"/>
+        <a:font script="Talu" typeface="Microsoft New Tai Lue"/>
+        <a:font script="Tfng" typeface="Ebrima"/>
+      </a:majorFont>
+      <a:minorFont>
+        <a:latin typeface="Calibri" panose="020F0502020204030204"/>
+        <a:ea typeface=""/>
+        <a:cs typeface=""/>
+        <a:font script="Jpan" typeface="游ゴシック"/>
+        <a:font script="Hang" typeface="맑은 고딕"/>
+        <a:font script="Hans" typeface="等线"/>
+        <a:font script="Hant" typeface="新細明體"/>
+        <a:font script="Arab" typeface="Arial"/>
+        <a:font script="Hebr" typeface="Arial"/>
+        <a:font script="Thai" typeface="Cordia New"/>
+        <a:font script="Ethi" typeface="Nyala"/>
+        <a:font script="Beng" typeface="Vrinda"/>
+        <a:font script="Gujr" typeface="Shruti"/>
+        <a:font script="Khmr" typeface="DaunPenh"/>
+        <a:font script="Knda" typeface="Tunga"/>
+        <a:font script="Guru" typeface="Raavi"/>
+        <a:font script="Cans" typeface="Euphemia"/>
+        <a:font script="Cher" typeface="Plantagenet Cherokee"/>
+        <a:font script="Yiii" typeface="Microsoft Yi Baiti"/>
+        <a:font script="Tibt" typeface="Microsoft Himalaya"/>
+        <a:font script="Thaa" typeface="MV Boli"/>
+        <a:font script="Deva" typeface="Mangal"/>
+        <a:font script="Telu" typeface="Gautami"/>
+        <a:font script="Taml" typeface="Latha"/>
+        <a:font script="Syrc" typeface="Estrangelo Edessa"/>
+        <a:font script="Orya" typeface="Kalinga"/>
+        <a:font script="Mlym" typeface="Kartika"/>
+        <a:font script="Laoo" typeface="DokChampa"/>
+        <a:font script="Sinh" typeface="Iskoola Pota"/>
+        <a:font script="Mong" typeface="Mongolian Baiti"/>
+        <a:font script="Viet" typeface="Arial"/>
+        <a:font script="Uigh" typeface="Microsoft Uighur"/>
+        <a:font script="Geor" typeface="Sylfaen"/>
+        <a:font script="Armn" typeface="Arial"/>
+        <a:font script="Bugi" typeface="Leelawadee UI"/>
+        <a:font script="Bopo" typeface="Microsoft JhengHei"/>
+        <a:font script="Java" typeface="Javanese Text"/>
+        <a:font script="Lisu" typeface="Segoe UI"/>
+        <a:font script="Mymr" typeface="Myanmar Text"/>
+        <a:font script="Nkoo" typeface="Ebrima"/>
+        <a:font script="Olck" typeface="Nirmala UI"/>
+        <a:font script="Osma" typeface="Ebrima"/>
+        <a:font script="Phag" typeface="Phagspa"/>
+        <a:font script="Syrn" typeface="Estrangelo Edessa"/>
+        <a:font script="Syrj" typeface="Estrangelo Edessa"/>
+        <a:font script="Syre" typeface="Estrangelo Edessa"/>
+        <a:font script="Sora" typeface="Nirmala UI"/>
+        <a:font script="Tale" typeface="Microsoft Tai Le"/>
+        <a:font script="Talu" typeface="Microsoft New Tai Lue"/>
+        <a:font script="Tfng" typeface="Ebrima"/>
+      </a:minorFont>
+    </a:fontScheme>
+    <a:fmtScheme name="Office">
+      <a:fillStyleLst>
+        <a:solidFill>
+          <a:schemeClr val="phClr"/>
+        </a:solidFill>
+        <a:gradFill rotWithShape="1">
+          <a:gsLst>
+            <a:gs pos="0">
+              <a:schemeClr val="phClr">
+                <a:lumMod val="110000"/>
+                <a:satMod val="105000"/>
+                <a:tint val="67000"/>
+              </a:schemeClr>
+            </a:gs>
+            <a:gs pos="50000">
+              <a:schemeClr val="phClr">
+                <a:lumMod val="105000"/>
+                <a:satMod val="103000"/>
+                <a:tint val="73000"/>
+              </a:schemeClr>
+            </a:gs>
+            <a:gs pos="100000">
+              <a:schemeClr val="phClr">
+                <a:lumMod val="105000"/>
+                <a:satMod val="109000"/>
+                <a:tint val="81000"/>
+              </a:schemeClr>
+            </a:gs>
+          </a:gsLst>
+          <a:lin ang="5400000" scaled="0"/>
+        </a:gradFill>
+        <a:gradFill rotWithShape="1">
+          <a:gsLst>
+            <a:gs pos="0">
+              <a:schemeClr val="phClr">
+                <a:satMod val="103000"/>
+                <a:lumMod val="102000"/>
+                <a:tint val="94000"/>
+              </a:schemeClr>
+            </a:gs>
+            <a:gs pos="50000">
+              <a:schemeClr val="phClr">
+                <a:satMod val="110000"/>
+                <a:lumMod val="100000"/>
+                <a:shade val="100000"/>
+              </a:schemeClr>
+            </a:gs>
+            <a:gs pos="100000">
+              <a:schemeClr val="phClr">
+                <a:lumMod val="99000"/>
+                <a:satMod val="120000"/>
+                <a:shade val="78000"/>
+              </a:schemeClr>
+            </a:gs>
+          </a:gsLst>
+          <a:lin ang="5400000" scaled="0"/>
+        </a:gradFill>
+      </a:fillStyleLst>
+      <a:lnStyleLst>
+        <a:ln w="6350" cap="flat" cmpd="sng" algn="ctr">
+          <a:solidFill>
+            <a:schemeClr val="phClr"/>
+          </a:solidFill>
+          <a:prstDash val="solid"/>
+          <a:miter lim="800000"/>
+        </a:ln>
+        <a:ln w="12700" cap="flat" cmpd="sng" algn="ctr">
+          <a:solidFill>
+            <a:schemeClr val="phClr"/>
+          </a:solidFill>
+          <a:prstDash val="solid"/>
+          <a:miter lim="800000"/>
+        </a:ln>
+        <a:ln w="19050" cap="flat" cmpd="sng" algn="ctr">
+          <a:solidFill>
+            <a:schemeClr val="phClr"/>
+          </a:solidFill>
+          <a:prstDash val="solid"/>
+          <a:miter lim="800000"/>
+        </a:ln>
+      </a:lnStyleLst>
+      <a:effectStyleLst>
+        <a:effectStyle>
+          <a:effectLst/>
+        </a:effectStyle>
+        <a:effectStyle>
+          <a:effectLst/>
+        </a:effectStyle>
+        <a:effectStyle>
+          <a:effectLst>
+            <a:outerShdw blurRad="57150" dist="19050" dir="5400000" algn="ctr" rotWithShape="0">
+              <a:srgbClr val="000000">
+                <a:alpha val="63000"/>
+              </a:srgbClr>
+            </a:outerShdw>
+          </a:effectLst>
+        </a:effectStyle>
+      </a:effectStyleLst>
+      <a:bgFillStyleLst>
+        <a:solidFill>
+          <a:schemeClr val="phClr"/>
+        </a:solidFill>
+        <a:solidFill>
+          <a:schemeClr val="phClr">
+            <a:tint val="95000"/>
+            <a:satMod val="170000"/>
+          </a:schemeClr>
+        </a:solidFill>
+        <a:gradFill rotWithShape="1">
+          <a:gsLst>
+            <a:gs pos="0">
+              <a:schemeClr val="phClr">
+                <a:tint val="93000"/>
+                <a:satMod val="150000"/>
+                <a:shade val="98000"/>
+                <a:lumMod val="102000"/>
+              </a:schemeClr>
+            </a:gs>
+            <a:gs pos="50000">
+              <a:schemeClr val="phClr">
+                <a:tint val="98000"/>
+                <a:satMod val="130000"/>
+                <a:shade val="90000"/>
+                <a:lumMod val="103000"/>
+              </a:schemeClr>
+            </a:gs>
+            <a:gs pos="100000">
+              <a:schemeClr val="phClr">
+                <a:shade val="63000"/>
+                <a:satMod val="120000"/>
+              </a:schemeClr>
+            </a:gs>
+          </a:gsLst>
+          <a:lin ang="5400000" scaled="0"/>
+        </a:gradFill>
+      </a:bgFillStyleLst>
+    </a:fmtScheme>
+  </a:themeElements>
+  <a:objectDefaults/>
+  <a:extraClrSchemeLst/>
+  <a:extLst>
+    <a:ext uri="{05A4C25C-085E-4340-85A3-A5531E510DB2}">
+      <thm15:themeFamily xmlns:thm15="http://schemas.microsoft.com/office/thememl/2012/main" name="Office Theme" id="{62F939B6-93AF-4DB8-9C6B-D6C7DFDC589F}" vid="{4A3C46E8-61CC-4603-A589-7422A47A8E4A}"/>
+    </a:ext>
+  </a:extLst>
+</a:theme>
 </file>